--- a/Sem 7/CS4102 Machine Learning/Notes/ML_Lec_4.pptx
+++ b/Sem 7/CS4102 Machine Learning/Notes/ML_Lec_4.pptx
@@ -1,57 +1,57 @@
 
 <file path=ppt/presentation.xml><?xml version="1.0" encoding="utf-8"?>
-<p:presentation xmlns:a="http://schemas.openxmlformats.org/drawingml/2006/main" xmlns:r="http://schemas.openxmlformats.org/officeDocument/2006/relationships" xmlns:p="http://schemas.openxmlformats.org/presentationml/2006/main" saveSubsetFonts="1">
+<p:presentation xmlns:a="http://schemas.openxmlformats.org/drawingml/2006/main" xmlns:r="http://schemas.openxmlformats.org/officeDocument/2006/relationships" xmlns:mc="http://schemas.openxmlformats.org/markup-compatibility/2006" xmlns:mv="urn:schemas-microsoft-com:mac:vml" xmlns:p="http://schemas.openxmlformats.org/presentationml/2006/main" xmlns:c="http://schemas.openxmlformats.org/drawingml/2006/chart" xmlns:dgm="http://schemas.openxmlformats.org/drawingml/2006/diagram" xmlns:o="urn:schemas-microsoft-com:office:office" xmlns:v="urn:schemas-microsoft-com:vml" xmlns:pvml="urn:schemas-microsoft-com:office:powerpoint" xmlns:com="http://schemas.openxmlformats.org/drawingml/2006/compatibility" xmlns:p14="http://schemas.microsoft.com/office/powerpoint/2010/main" xmlns:p15="http://schemas.microsoft.com/office/powerpoint/2012/main" xmlns:ahyp="http://schemas.microsoft.com/office/drawing/2018/hyperlinkcolor" autoCompressPictures="0" strictFirstAndLastChars="0" saveSubsetFonts="1">
   <p:sldMasterIdLst>
-    <p:sldMasterId id="2147483648" r:id="rId1"/>
+    <p:sldMasterId id="2147483648" r:id="rId4"/>
   </p:sldMasterIdLst>
   <p:sldIdLst>
-    <p:sldId id="256" r:id="rId2"/>
-    <p:sldId id="257" r:id="rId3"/>
-    <p:sldId id="258" r:id="rId4"/>
-    <p:sldId id="259" r:id="rId5"/>
-    <p:sldId id="294" r:id="rId6"/>
-    <p:sldId id="260" r:id="rId7"/>
-    <p:sldId id="261" r:id="rId8"/>
-    <p:sldId id="262" r:id="rId9"/>
-    <p:sldId id="264" r:id="rId10"/>
-    <p:sldId id="265" r:id="rId11"/>
-    <p:sldId id="266" r:id="rId12"/>
-    <p:sldId id="267" r:id="rId13"/>
-    <p:sldId id="290" r:id="rId14"/>
-    <p:sldId id="291" r:id="rId15"/>
-    <p:sldId id="289" r:id="rId16"/>
+    <p:sldId id="256" r:id="rId5"/>
+    <p:sldId id="257" r:id="rId6"/>
+    <p:sldId id="258" r:id="rId7"/>
+    <p:sldId id="259" r:id="rId8"/>
+    <p:sldId id="260" r:id="rId9"/>
+    <p:sldId id="261" r:id="rId10"/>
+    <p:sldId id="262" r:id="rId11"/>
+    <p:sldId id="263" r:id="rId12"/>
+    <p:sldId id="264" r:id="rId13"/>
+    <p:sldId id="265" r:id="rId14"/>
+    <p:sldId id="266" r:id="rId15"/>
+    <p:sldId id="267" r:id="rId16"/>
     <p:sldId id="268" r:id="rId17"/>
     <p:sldId id="269" r:id="rId18"/>
     <p:sldId id="270" r:id="rId19"/>
-    <p:sldId id="293" r:id="rId20"/>
-    <p:sldId id="271" r:id="rId21"/>
-    <p:sldId id="272" r:id="rId22"/>
-    <p:sldId id="273" r:id="rId23"/>
-    <p:sldId id="274" r:id="rId24"/>
-    <p:sldId id="275" r:id="rId25"/>
+    <p:sldId id="271" r:id="rId20"/>
+    <p:sldId id="272" r:id="rId21"/>
+    <p:sldId id="273" r:id="rId22"/>
+    <p:sldId id="274" r:id="rId23"/>
+    <p:sldId id="275" r:id="rId24"/>
+    <p:sldId id="276" r:id="rId25"/>
     <p:sldId id="277" r:id="rId26"/>
-    <p:sldId id="292" r:id="rId27"/>
-    <p:sldId id="278" r:id="rId28"/>
-    <p:sldId id="279" r:id="rId29"/>
-    <p:sldId id="280" r:id="rId30"/>
-    <p:sldId id="281" r:id="rId31"/>
-    <p:sldId id="282" r:id="rId32"/>
-    <p:sldId id="283" r:id="rId33"/>
-    <p:sldId id="284" r:id="rId34"/>
-    <p:sldId id="285" r:id="rId35"/>
-    <p:sldId id="286" r:id="rId36"/>
-    <p:sldId id="276" r:id="rId37"/>
-    <p:sldId id="287" r:id="rId38"/>
-    <p:sldId id="288" r:id="rId39"/>
+    <p:sldId id="278" r:id="rId27"/>
+    <p:sldId id="279" r:id="rId28"/>
+    <p:sldId id="280" r:id="rId29"/>
+    <p:sldId id="281" r:id="rId30"/>
+    <p:sldId id="282" r:id="rId31"/>
+    <p:sldId id="283" r:id="rId32"/>
+    <p:sldId id="284" r:id="rId33"/>
+    <p:sldId id="285" r:id="rId34"/>
+    <p:sldId id="286" r:id="rId35"/>
+    <p:sldId id="287" r:id="rId36"/>
+    <p:sldId id="288" r:id="rId37"/>
+    <p:sldId id="289" r:id="rId38"/>
+    <p:sldId id="290" r:id="rId39"/>
+    <p:sldId id="291" r:id="rId40"/>
+    <p:sldId id="292" r:id="rId41"/>
+    <p:sldId id="293" r:id="rId42"/>
   </p:sldIdLst>
-  <p:sldSz cx="9144000" cy="6858000" type="screen4x3"/>
+  <p:sldSz cy="6858000" cx="9144000"/>
   <p:notesSz cx="6858000" cy="9144000"/>
   <p:defaultTextStyle>
-    <a:defPPr>
+    <a:defPPr lvl="0">
       <a:defRPr lang="en-US"/>
     </a:defPPr>
-    <a:lvl1pPr marL="0" algn="l" defTabSz="914400" rtl="0" eaLnBrk="1" latinLnBrk="0" hangingPunct="1">
-      <a:defRPr sz="1800" kern="1200">
+    <a:lvl1pPr defTabSz="914400" eaLnBrk="1" hangingPunct="1" latinLnBrk="0" lvl="0" marL="0" rtl="0" algn="l">
+      <a:defRPr kern="1200" sz="1800">
         <a:solidFill>
           <a:schemeClr val="tx1"/>
         </a:solidFill>
@@ -60,8 +60,8 @@
         <a:cs typeface="+mn-cs"/>
       </a:defRPr>
     </a:lvl1pPr>
-    <a:lvl2pPr marL="457200" algn="l" defTabSz="914400" rtl="0" eaLnBrk="1" latinLnBrk="0" hangingPunct="1">
-      <a:defRPr sz="1800" kern="1200">
+    <a:lvl2pPr defTabSz="914400" eaLnBrk="1" hangingPunct="1" latinLnBrk="0" lvl="1" marL="457200" rtl="0" algn="l">
+      <a:defRPr kern="1200" sz="1800">
         <a:solidFill>
           <a:schemeClr val="tx1"/>
         </a:solidFill>
@@ -70,8 +70,8 @@
         <a:cs typeface="+mn-cs"/>
       </a:defRPr>
     </a:lvl2pPr>
-    <a:lvl3pPr marL="914400" algn="l" defTabSz="914400" rtl="0" eaLnBrk="1" latinLnBrk="0" hangingPunct="1">
-      <a:defRPr sz="1800" kern="1200">
+    <a:lvl3pPr defTabSz="914400" eaLnBrk="1" hangingPunct="1" latinLnBrk="0" lvl="2" marL="914400" rtl="0" algn="l">
+      <a:defRPr kern="1200" sz="1800">
         <a:solidFill>
           <a:schemeClr val="tx1"/>
         </a:solidFill>
@@ -80,8 +80,8 @@
         <a:cs typeface="+mn-cs"/>
       </a:defRPr>
     </a:lvl3pPr>
-    <a:lvl4pPr marL="1371600" algn="l" defTabSz="914400" rtl="0" eaLnBrk="1" latinLnBrk="0" hangingPunct="1">
-      <a:defRPr sz="1800" kern="1200">
+    <a:lvl4pPr defTabSz="914400" eaLnBrk="1" hangingPunct="1" latinLnBrk="0" lvl="3" marL="1371600" rtl="0" algn="l">
+      <a:defRPr kern="1200" sz="1800">
         <a:solidFill>
           <a:schemeClr val="tx1"/>
         </a:solidFill>
@@ -90,8 +90,8 @@
         <a:cs typeface="+mn-cs"/>
       </a:defRPr>
     </a:lvl4pPr>
-    <a:lvl5pPr marL="1828800" algn="l" defTabSz="914400" rtl="0" eaLnBrk="1" latinLnBrk="0" hangingPunct="1">
-      <a:defRPr sz="1800" kern="1200">
+    <a:lvl5pPr defTabSz="914400" eaLnBrk="1" hangingPunct="1" latinLnBrk="0" lvl="4" marL="1828800" rtl="0" algn="l">
+      <a:defRPr kern="1200" sz="1800">
         <a:solidFill>
           <a:schemeClr val="tx1"/>
         </a:solidFill>
@@ -100,8 +100,8 @@
         <a:cs typeface="+mn-cs"/>
       </a:defRPr>
     </a:lvl5pPr>
-    <a:lvl6pPr marL="2286000" algn="l" defTabSz="914400" rtl="0" eaLnBrk="1" latinLnBrk="0" hangingPunct="1">
-      <a:defRPr sz="1800" kern="1200">
+    <a:lvl6pPr defTabSz="914400" eaLnBrk="1" hangingPunct="1" latinLnBrk="0" lvl="5" marL="2286000" rtl="0" algn="l">
+      <a:defRPr kern="1200" sz="1800">
         <a:solidFill>
           <a:schemeClr val="tx1"/>
         </a:solidFill>
@@ -110,8 +110,8 @@
         <a:cs typeface="+mn-cs"/>
       </a:defRPr>
     </a:lvl6pPr>
-    <a:lvl7pPr marL="2743200" algn="l" defTabSz="914400" rtl="0" eaLnBrk="1" latinLnBrk="0" hangingPunct="1">
-      <a:defRPr sz="1800" kern="1200">
+    <a:lvl7pPr defTabSz="914400" eaLnBrk="1" hangingPunct="1" latinLnBrk="0" lvl="6" marL="2743200" rtl="0" algn="l">
+      <a:defRPr kern="1200" sz="1800">
         <a:solidFill>
           <a:schemeClr val="tx1"/>
         </a:solidFill>
@@ -120,8 +120,8 @@
         <a:cs typeface="+mn-cs"/>
       </a:defRPr>
     </a:lvl7pPr>
-    <a:lvl8pPr marL="3200400" algn="l" defTabSz="914400" rtl="0" eaLnBrk="1" latinLnBrk="0" hangingPunct="1">
-      <a:defRPr sz="1800" kern="1200">
+    <a:lvl8pPr defTabSz="914400" eaLnBrk="1" hangingPunct="1" latinLnBrk="0" lvl="7" marL="3200400" rtl="0" algn="l">
+      <a:defRPr kern="1200" sz="1800">
         <a:solidFill>
           <a:schemeClr val="tx1"/>
         </a:solidFill>
@@ -130,8 +130,8 @@
         <a:cs typeface="+mn-cs"/>
       </a:defRPr>
     </a:lvl8pPr>
-    <a:lvl9pPr marL="3657600" algn="l" defTabSz="914400" rtl="0" eaLnBrk="1" latinLnBrk="0" hangingPunct="1">
-      <a:defRPr sz="1800" kern="1200">
+    <a:lvl9pPr defTabSz="914400" eaLnBrk="1" hangingPunct="1" latinLnBrk="0" lvl="8" marL="3657600" rtl="0" algn="l">
+      <a:defRPr kern="1200" sz="1800">
         <a:solidFill>
           <a:schemeClr val="tx1"/>
         </a:solidFill>
@@ -141,7 +141,47 @@
       </a:defRPr>
     </a:lvl9pPr>
   </p:defaultTextStyle>
+  <p:extLst>
+    <p:ext uri="{EFAFB233-063F-42B5-8137-9DF3F51BA10A}">
+      <p15:sldGuideLst>
+        <p15:guide id="1" orient="horz" pos="2160">
+          <p15:clr>
+            <a:srgbClr val="000000"/>
+          </p15:clr>
+        </p15:guide>
+        <p15:guide id="2" pos="2880">
+          <p15:clr>
+            <a:srgbClr val="000000"/>
+          </p15:clr>
+        </p15:guide>
+      </p15:sldGuideLst>
+    </p:ext>
+  </p:extLst>
 </p:presentation>
+</file>
+
+<file path=ppt/presProps1.xml><?xml version="1.0" encoding="utf-8"?>
+<p:presentationPr xmlns:a="http://schemas.openxmlformats.org/drawingml/2006/main" xmlns:r="http://schemas.openxmlformats.org/officeDocument/2006/relationships" xmlns:mc="http://schemas.openxmlformats.org/markup-compatibility/2006" xmlns:mv="urn:schemas-microsoft-com:mac:vml" xmlns:p="http://schemas.openxmlformats.org/presentationml/2006/main" xmlns:c="http://schemas.openxmlformats.org/drawingml/2006/chart" xmlns:dgm="http://schemas.openxmlformats.org/drawingml/2006/diagram" xmlns:o="urn:schemas-microsoft-com:office:office" xmlns:v="urn:schemas-microsoft-com:vml" xmlns:pvml="urn:schemas-microsoft-com:office:powerpoint" xmlns:com="http://schemas.openxmlformats.org/drawingml/2006/compatibility" xmlns:p14="http://schemas.microsoft.com/office/powerpoint/2010/main" xmlns:p15="http://schemas.microsoft.com/office/powerpoint/2012/main" xmlns:ahyp="http://schemas.microsoft.com/office/drawing/2018/hyperlinkcolor"/>
+</file>
+
+<file path=ppt/viewProps1.xml><?xml version="1.0" encoding="utf-8"?>
+<p:viewPr xmlns:a="http://schemas.openxmlformats.org/drawingml/2006/main" xmlns:r="http://schemas.openxmlformats.org/officeDocument/2006/relationships" xmlns:mc="http://schemas.openxmlformats.org/markup-compatibility/2006" xmlns:mv="urn:schemas-microsoft-com:mac:vml" xmlns:p="http://schemas.openxmlformats.org/presentationml/2006/main" xmlns:c="http://schemas.openxmlformats.org/drawingml/2006/chart" xmlns:dgm="http://schemas.openxmlformats.org/drawingml/2006/diagram" xmlns:o="urn:schemas-microsoft-com:office:office" xmlns:v="urn:schemas-microsoft-com:vml" xmlns:pvml="urn:schemas-microsoft-com:office:powerpoint" xmlns:com="http://schemas.openxmlformats.org/drawingml/2006/compatibility" xmlns:p14="http://schemas.microsoft.com/office/powerpoint/2010/main" xmlns:p15="http://schemas.microsoft.com/office/powerpoint/2012/main" xmlns:ahyp="http://schemas.microsoft.com/office/drawing/2018/hyperlinkcolor" showComments="0">
+  <p:slideViewPr>
+    <p:cSldViewPr snapToGrid="0">
+      <p:cViewPr varScale="1">
+        <p:scale>
+          <a:sx n="100" d="100"/>
+          <a:sy n="100" d="100"/>
+        </p:scale>
+        <p:origin x="0" y="0"/>
+      </p:cViewPr>
+      <p:guideLst>
+        <p:guide pos="2160" orient="horz"/>
+        <p:guide pos="2880"/>
+      </p:guideLst>
+    </p:cSldViewPr>
+  </p:slideViewPr>
+</p:viewPr>
 </file>
 
 <file path=ppt/slideLayouts/slideLayout1.xml><?xml version="1.0" encoding="utf-8"?>
